--- a/coastal-20-contact-me.pptx
+++ b/coastal-20-contact-me.pptx
@@ -3316,7 +3316,7 @@
         </p:nvSpPr>
         <p:spPr>
           <a:xfrm>
-            <a:off x="762000" y="5800725"/>
+            <a:off x="762000" y="6096000"/>
             <a:ext cx="8763000" cy="9525"/>
           </a:xfrm>
           <a:prstGeom prst="rect">
@@ -3360,7 +3360,7 @@
         </p:nvSpPr>
         <p:spPr>
           <a:xfrm>
-            <a:off x="762000" y="6553200"/>
+            <a:off x="762000" y="7058025"/>
             <a:ext cx="8763000" cy="9525"/>
           </a:xfrm>
           <a:prstGeom prst="rect">
@@ -3404,7 +3404,7 @@
         </p:nvSpPr>
         <p:spPr>
           <a:xfrm>
-            <a:off x="762000" y="7305675"/>
+            <a:off x="762000" y="8020050"/>
             <a:ext cx="8763000" cy="9525"/>
           </a:xfrm>
           <a:prstGeom prst="rect">
@@ -3448,7 +3448,7 @@
         </p:nvSpPr>
         <p:spPr>
           <a:xfrm>
-            <a:off x="762000" y="8058150"/>
+            <a:off x="762000" y="8982075"/>
             <a:ext cx="8763000" cy="9525"/>
           </a:xfrm>
           <a:prstGeom prst="rect">
@@ -3492,8 +3492,8 @@
         </p:nvSpPr>
         <p:spPr>
           <a:xfrm>
-            <a:off x="762000" y="15840075"/>
-            <a:ext cx="2059781" cy="9525"/>
+            <a:off x="762000" y="15621000"/>
+            <a:ext cx="2709118" cy="9525"/>
           </a:xfrm>
           <a:prstGeom prst="rect">
             <a:avLst/>
@@ -3537,7 +3537,7 @@
         <p:spPr>
           <a:xfrm>
             <a:off x="762000" y="16373475"/>
-            <a:ext cx="2059781" cy="9525"/>
+            <a:ext cx="2709118" cy="9525"/>
           </a:xfrm>
           <a:prstGeom prst="rect">
             <a:avLst/>
@@ -3580,8 +3580,8 @@
         </p:nvSpPr>
         <p:spPr>
           <a:xfrm>
-            <a:off x="762000" y="15840075"/>
-            <a:ext cx="9525" cy="542925"/>
+            <a:off x="762000" y="15621000"/>
+            <a:ext cx="9525" cy="762000"/>
           </a:xfrm>
           <a:prstGeom prst="rect">
             <a:avLst/>
@@ -3624,8 +3624,8 @@
         </p:nvSpPr>
         <p:spPr>
           <a:xfrm>
-            <a:off x="2812256" y="15840075"/>
-            <a:ext cx="9525" cy="542925"/>
+            <a:off x="3461593" y="15621000"/>
+            <a:ext cx="9525" cy="762000"/>
           </a:xfrm>
           <a:prstGeom prst="rect">
             <a:avLst/>
@@ -3668,7 +3668,7 @@
         </p:nvSpPr>
         <p:spPr>
           <a:xfrm>
-            <a:off x="1041493" y="16057656"/>
+            <a:off x="1079593" y="15948118"/>
             <a:ext cx="107763" cy="107763"/>
           </a:xfrm>
           <a:prstGeom prst="rect">
@@ -3751,8 +3751,8 @@
         </p:nvSpPr>
         <p:spPr>
           <a:xfrm>
-            <a:off x="7718822" y="938212"/>
-            <a:ext cx="3270885" cy="104775"/>
+            <a:off x="6699052" y="904875"/>
+            <a:ext cx="4902518" cy="171450"/>
           </a:xfrm>
           <a:prstGeom prst="rect">
             <a:avLst/>
@@ -3765,7 +3765,7 @@
           <a:p>
             <a:pPr algn="l"/>
             <a:r>
-              <a:rPr sz="750" i="0" b="1" spc="240">
+              <a:rPr sz="1200" i="0" b="1" spc="360">
                 <a:solidFill>
                   <a:srgbClr val="F3EEE7"/>
                 </a:solidFill>
@@ -3787,7 +3787,7 @@
         <p:spPr>
           <a:xfrm>
             <a:off x="762000" y="2286000"/>
-            <a:ext cx="14401800" cy="142875"/>
+            <a:ext cx="14401800" cy="228600"/>
           </a:xfrm>
           <a:prstGeom prst="rect">
             <a:avLst/>
@@ -3800,7 +3800,7 @@
           <a:p>
             <a:pPr algn="l"/>
             <a:r>
-              <a:rPr sz="975" i="0" b="1" spc="351">
+              <a:rPr sz="1575" i="0" b="1" spc="472">
                 <a:solidFill>
                   <a:srgbClr val="A98BA6"/>
                 </a:solidFill>
@@ -3821,7 +3821,7 @@
         </p:nvSpPr>
         <p:spPr>
           <a:xfrm>
-            <a:off x="762000" y="2543175"/>
+            <a:off x="762000" y="2628900"/>
             <a:ext cx="6119574" cy="1095375"/>
           </a:xfrm>
           <a:prstGeom prst="rect">
@@ -3860,7 +3860,7 @@
         </p:nvSpPr>
         <p:spPr>
           <a:xfrm>
-            <a:off x="762000" y="3533775"/>
+            <a:off x="762000" y="3619500"/>
             <a:ext cx="8216027" cy="1095375"/>
           </a:xfrm>
           <a:prstGeom prst="rect">
@@ -3899,8 +3899,8 @@
         </p:nvSpPr>
         <p:spPr>
           <a:xfrm>
-            <a:off x="762000" y="5372100"/>
-            <a:ext cx="1029176" cy="114300"/>
+            <a:off x="762000" y="5534025"/>
+            <a:ext cx="1284684" cy="171450"/>
           </a:xfrm>
           <a:prstGeom prst="rect">
             <a:avLst/>
@@ -3913,7 +3913,7 @@
           <a:p>
             <a:pPr algn="l"/>
             <a:r>
-              <a:rPr sz="825" i="0" b="1" spc="247">
+              <a:rPr sz="1200" i="0" b="1" spc="312">
                 <a:solidFill>
                   <a:srgbClr val="A98BA6"/>
                 </a:solidFill>
@@ -3934,8 +3934,8 @@
         </p:nvSpPr>
         <p:spPr>
           <a:xfrm>
-            <a:off x="7739211" y="5267325"/>
-            <a:ext cx="3238262" cy="323850"/>
+            <a:off x="7024985" y="5391150"/>
+            <a:ext cx="4381024" cy="457200"/>
           </a:xfrm>
           <a:prstGeom prst="rect">
             <a:avLst/>
@@ -3948,7 +3948,7 @@
           <a:p>
             <a:pPr algn="l"/>
             <a:r>
-              <a:rPr sz="2250" i="1" b="0">
+              <a:rPr sz="3150" i="1" b="0">
                 <a:solidFill>
                   <a:srgbClr val="F3EEE7"/>
                 </a:solidFill>
@@ -3969,8 +3969,8 @@
         </p:nvSpPr>
         <p:spPr>
           <a:xfrm>
-            <a:off x="762000" y="6124575"/>
-            <a:ext cx="1154192" cy="114300"/>
+            <a:off x="762000" y="6496050"/>
+            <a:ext cx="1456611" cy="171450"/>
           </a:xfrm>
           <a:prstGeom prst="rect">
             <a:avLst/>
@@ -3983,7 +3983,7 @@
           <a:p>
             <a:pPr algn="l"/>
             <a:r>
-              <a:rPr sz="825" i="0" b="1" spc="247">
+              <a:rPr sz="1200" i="0" b="1" spc="312">
                 <a:solidFill>
                   <a:srgbClr val="A98BA6"/>
                 </a:solidFill>
@@ -4004,8 +4004,8 @@
         </p:nvSpPr>
         <p:spPr>
           <a:xfrm>
-            <a:off x="6603653" y="6019800"/>
-            <a:ext cx="5055156" cy="323850"/>
+            <a:off x="5435203" y="6353175"/>
+            <a:ext cx="6924675" cy="457200"/>
           </a:xfrm>
           <a:prstGeom prst="rect">
             <a:avLst/>
@@ -4018,7 +4018,7 @@
           <a:p>
             <a:pPr algn="l"/>
             <a:r>
-              <a:rPr sz="2250" i="1" b="0">
+              <a:rPr sz="3150" i="1" b="0">
                 <a:solidFill>
                   <a:srgbClr val="F3EEE7"/>
                 </a:solidFill>
@@ -4039,8 +4039,8 @@
         </p:nvSpPr>
         <p:spPr>
           <a:xfrm>
-            <a:off x="762000" y="6877050"/>
-            <a:ext cx="742474" cy="114300"/>
+            <a:off x="762000" y="7458075"/>
+            <a:ext cx="887016" cy="171450"/>
           </a:xfrm>
           <a:prstGeom prst="rect">
             <a:avLst/>
@@ -4053,7 +4053,7 @@
           <a:p>
             <a:pPr algn="l"/>
             <a:r>
-              <a:rPr sz="825" i="0" b="1" spc="247">
+              <a:rPr sz="1200" i="0" b="1" spc="312">
                 <a:solidFill>
                   <a:srgbClr val="A98BA6"/>
                 </a:solidFill>
@@ -4074,8 +4074,8 @@
         </p:nvSpPr>
         <p:spPr>
           <a:xfrm>
-            <a:off x="7722543" y="6772275"/>
-            <a:ext cx="3264932" cy="323850"/>
+            <a:off x="7001619" y="7315200"/>
+            <a:ext cx="4418409" cy="457200"/>
           </a:xfrm>
           <a:prstGeom prst="rect">
             <a:avLst/>
@@ -4088,7 +4088,7 @@
           <a:p>
             <a:pPr algn="l"/>
             <a:r>
-              <a:rPr sz="2250" i="1" b="0">
+              <a:rPr sz="3150" i="1" b="0">
                 <a:solidFill>
                   <a:srgbClr val="F3EEE7"/>
                 </a:solidFill>
@@ -4109,8 +4109,8 @@
         </p:nvSpPr>
         <p:spPr>
           <a:xfrm>
-            <a:off x="762000" y="7629525"/>
-            <a:ext cx="923211" cy="114300"/>
+            <a:off x="762000" y="8420100"/>
+            <a:ext cx="1140142" cy="171450"/>
           </a:xfrm>
           <a:prstGeom prst="rect">
             <a:avLst/>
@@ -4123,7 +4123,7 @@
           <a:p>
             <a:pPr algn="l"/>
             <a:r>
-              <a:rPr sz="825" i="0" b="1" spc="247">
+              <a:rPr sz="1200" i="0" b="1" spc="312">
                 <a:solidFill>
                   <a:srgbClr val="A98BA6"/>
                 </a:solidFill>
@@ -4144,8 +4144,8 @@
         </p:nvSpPr>
         <p:spPr>
           <a:xfrm>
-            <a:off x="7437834" y="7524750"/>
-            <a:ext cx="3720465" cy="323850"/>
+            <a:off x="6603057" y="8277225"/>
+            <a:ext cx="5056108" cy="457200"/>
           </a:xfrm>
           <a:prstGeom prst="rect">
             <a:avLst/>
@@ -4158,7 +4158,7 @@
           <a:p>
             <a:pPr algn="l"/>
             <a:r>
-              <a:rPr sz="2250" i="1" b="0">
+              <a:rPr sz="3150" i="1" b="0">
                 <a:solidFill>
                   <a:srgbClr val="F3EEE7"/>
                 </a:solidFill>
@@ -4179,8 +4179,8 @@
         </p:nvSpPr>
         <p:spPr>
           <a:xfrm>
-            <a:off x="1266825" y="16035338"/>
-            <a:ext cx="1985010" cy="152400"/>
+            <a:off x="1323975" y="15878175"/>
+            <a:ext cx="2841069" cy="247650"/>
           </a:xfrm>
           <a:prstGeom prst="rect">
             <a:avLst/>
@@ -4193,7 +4193,7 @@
           <a:p>
             <a:pPr algn="l"/>
             <a:r>
-              <a:rPr sz="1050" i="0" b="1" spc="231">
+              <a:rPr sz="1650" i="0" b="1" spc="330">
                 <a:solidFill>
                   <a:srgbClr val="F3EEE7"/>
                 </a:solidFill>
@@ -4214,7 +4214,7 @@
         </p:nvSpPr>
         <p:spPr>
           <a:xfrm>
-            <a:off x="2402681" y="16021050"/>
+            <a:off x="3013918" y="15911512"/>
             <a:ext cx="579120" cy="180975"/>
           </a:xfrm>
           <a:prstGeom prst="rect">
@@ -4249,8 +4249,8 @@
         </p:nvSpPr>
         <p:spPr>
           <a:xfrm>
-            <a:off x="-2057400" y="17306925"/>
-            <a:ext cx="14401800" cy="123825"/>
+            <a:off x="-2057400" y="17249775"/>
+            <a:ext cx="14401800" cy="180975"/>
           </a:xfrm>
           <a:prstGeom prst="rect">
             <a:avLst/>
@@ -4263,7 +4263,7 @@
           <a:p>
             <a:pPr algn="ctr"/>
             <a:r>
-              <a:rPr sz="825" i="0" b="1" spc="264">
+              <a:rPr sz="1200" i="0" b="1" spc="360">
                 <a:solidFill>
                   <a:srgbClr val="F3EEE7"/>
                 </a:solidFill>

--- a/coastal-20-contact-me.pptx
+++ b/coastal-20-contact-me.pptx
@@ -3316,7 +3316,7 @@
         </p:nvSpPr>
         <p:spPr>
           <a:xfrm>
-            <a:off x="762000" y="6096000"/>
+            <a:off x="762000" y="6115050"/>
             <a:ext cx="8763000" cy="9525"/>
           </a:xfrm>
           <a:prstGeom prst="rect">
@@ -3360,7 +3360,7 @@
         </p:nvSpPr>
         <p:spPr>
           <a:xfrm>
-            <a:off x="762000" y="7058025"/>
+            <a:off x="762000" y="7077075"/>
             <a:ext cx="8763000" cy="9525"/>
           </a:xfrm>
           <a:prstGeom prst="rect">
@@ -3404,7 +3404,7 @@
         </p:nvSpPr>
         <p:spPr>
           <a:xfrm>
-            <a:off x="762000" y="8020050"/>
+            <a:off x="762000" y="8039100"/>
             <a:ext cx="8763000" cy="9525"/>
           </a:xfrm>
           <a:prstGeom prst="rect">
@@ -3448,7 +3448,7 @@
         </p:nvSpPr>
         <p:spPr>
           <a:xfrm>
-            <a:off x="762000" y="8982075"/>
+            <a:off x="762000" y="9001125"/>
             <a:ext cx="8763000" cy="9525"/>
           </a:xfrm>
           <a:prstGeom prst="rect">
@@ -3492,8 +3492,8 @@
         </p:nvSpPr>
         <p:spPr>
           <a:xfrm>
-            <a:off x="762000" y="15621000"/>
-            <a:ext cx="2709118" cy="9525"/>
+            <a:off x="762000" y="15516225"/>
+            <a:ext cx="3183731" cy="9525"/>
           </a:xfrm>
           <a:prstGeom prst="rect">
             <a:avLst/>
@@ -3537,7 +3537,7 @@
         <p:spPr>
           <a:xfrm>
             <a:off x="762000" y="16373475"/>
-            <a:ext cx="2709118" cy="9525"/>
+            <a:ext cx="3183731" cy="9525"/>
           </a:xfrm>
           <a:prstGeom prst="rect">
             <a:avLst/>
@@ -3580,8 +3580,8 @@
         </p:nvSpPr>
         <p:spPr>
           <a:xfrm>
-            <a:off x="762000" y="15621000"/>
-            <a:ext cx="9525" cy="762000"/>
+            <a:off x="762000" y="15516225"/>
+            <a:ext cx="9525" cy="866775"/>
           </a:xfrm>
           <a:prstGeom prst="rect">
             <a:avLst/>
@@ -3624,8 +3624,8 @@
         </p:nvSpPr>
         <p:spPr>
           <a:xfrm>
-            <a:off x="3461593" y="15621000"/>
-            <a:ext cx="9525" cy="762000"/>
+            <a:off x="3936206" y="15516225"/>
+            <a:ext cx="9525" cy="866775"/>
           </a:xfrm>
           <a:prstGeom prst="rect">
             <a:avLst/>
@@ -3668,7 +3668,7 @@
         </p:nvSpPr>
         <p:spPr>
           <a:xfrm>
-            <a:off x="1079593" y="15948118"/>
+            <a:off x="1117693" y="15895731"/>
             <a:ext cx="107763" cy="107763"/>
           </a:xfrm>
           <a:prstGeom prst="rect">
@@ -3751,8 +3751,8 @@
         </p:nvSpPr>
         <p:spPr>
           <a:xfrm>
-            <a:off x="6699052" y="904875"/>
-            <a:ext cx="4902518" cy="171450"/>
+            <a:off x="6321326" y="885825"/>
+            <a:ext cx="5506879" cy="209550"/>
           </a:xfrm>
           <a:prstGeom prst="rect">
             <a:avLst/>
@@ -3765,7 +3765,7 @@
           <a:p>
             <a:pPr algn="l"/>
             <a:r>
-              <a:rPr sz="1200" i="0" b="1" spc="360">
+              <a:rPr sz="1425" i="0" b="1" spc="370">
                 <a:solidFill>
                   <a:srgbClr val="F3EEE7"/>
                 </a:solidFill>
@@ -3787,7 +3787,7 @@
         <p:spPr>
           <a:xfrm>
             <a:off x="762000" y="2286000"/>
-            <a:ext cx="14401800" cy="228600"/>
+            <a:ext cx="14401800" cy="247650"/>
           </a:xfrm>
           <a:prstGeom prst="rect">
             <a:avLst/>
@@ -3800,7 +3800,7 @@
           <a:p>
             <a:pPr algn="l"/>
             <a:r>
-              <a:rPr sz="1575" i="0" b="1" spc="472">
+              <a:rPr sz="1650" i="0" b="1" spc="462">
                 <a:solidFill>
                   <a:srgbClr val="A98BA6"/>
                 </a:solidFill>
@@ -3821,7 +3821,7 @@
         </p:nvSpPr>
         <p:spPr>
           <a:xfrm>
-            <a:off x="762000" y="2628900"/>
+            <a:off x="762000" y="2647950"/>
             <a:ext cx="6119574" cy="1095375"/>
           </a:xfrm>
           <a:prstGeom prst="rect">
@@ -3860,7 +3860,7 @@
         </p:nvSpPr>
         <p:spPr>
           <a:xfrm>
-            <a:off x="762000" y="3619500"/>
+            <a:off x="762000" y="3638550"/>
             <a:ext cx="8216027" cy="1095375"/>
           </a:xfrm>
           <a:prstGeom prst="rect">
@@ -3900,7 +3900,7 @@
         <p:spPr>
           <a:xfrm>
             <a:off x="762000" y="5534025"/>
-            <a:ext cx="1284684" cy="171450"/>
+            <a:ext cx="1407795" cy="209550"/>
           </a:xfrm>
           <a:prstGeom prst="rect">
             <a:avLst/>
@@ -3913,7 +3913,7 @@
           <a:p>
             <a:pPr algn="l"/>
             <a:r>
-              <a:rPr sz="1200" i="0" b="1" spc="312">
+              <a:rPr sz="1425" i="0" b="1" spc="313">
                 <a:solidFill>
                   <a:srgbClr val="A98BA6"/>
                 </a:solidFill>
@@ -3934,7 +3934,7 @@
         </p:nvSpPr>
         <p:spPr>
           <a:xfrm>
-            <a:off x="7024985" y="5391150"/>
+            <a:off x="7024985" y="5410200"/>
             <a:ext cx="4381024" cy="457200"/>
           </a:xfrm>
           <a:prstGeom prst="rect">
@@ -3970,7 +3970,7 @@
         <p:spPr>
           <a:xfrm>
             <a:off x="762000" y="6496050"/>
-            <a:ext cx="1456611" cy="171450"/>
+            <a:ext cx="1600438" cy="209550"/>
           </a:xfrm>
           <a:prstGeom prst="rect">
             <a:avLst/>
@@ -3983,7 +3983,7 @@
           <a:p>
             <a:pPr algn="l"/>
             <a:r>
-              <a:rPr sz="1200" i="0" b="1" spc="312">
+              <a:rPr sz="1425" i="0" b="1" spc="313">
                 <a:solidFill>
                   <a:srgbClr val="A98BA6"/>
                 </a:solidFill>
@@ -4004,7 +4004,7 @@
         </p:nvSpPr>
         <p:spPr>
           <a:xfrm>
-            <a:off x="5435203" y="6353175"/>
+            <a:off x="5435203" y="6372225"/>
             <a:ext cx="6924675" cy="457200"/>
           </a:xfrm>
           <a:prstGeom prst="rect">
@@ -4040,7 +4040,7 @@
         <p:spPr>
           <a:xfrm>
             <a:off x="762000" y="7458075"/>
-            <a:ext cx="887016" cy="171450"/>
+            <a:ext cx="958929" cy="209550"/>
           </a:xfrm>
           <a:prstGeom prst="rect">
             <a:avLst/>
@@ -4053,7 +4053,7 @@
           <a:p>
             <a:pPr algn="l"/>
             <a:r>
-              <a:rPr sz="1200" i="0" b="1" spc="312">
+              <a:rPr sz="1425" i="0" b="1" spc="313">
                 <a:solidFill>
                   <a:srgbClr val="A98BA6"/>
                 </a:solidFill>
@@ -4074,7 +4074,7 @@
         </p:nvSpPr>
         <p:spPr>
           <a:xfrm>
-            <a:off x="7001619" y="7315200"/>
+            <a:off x="7001619" y="7334250"/>
             <a:ext cx="4418409" cy="457200"/>
           </a:xfrm>
           <a:prstGeom prst="rect">
@@ -4110,7 +4110,7 @@
         <p:spPr>
           <a:xfrm>
             <a:off x="762000" y="8420100"/>
-            <a:ext cx="1140142" cy="171450"/>
+            <a:ext cx="1247775" cy="209550"/>
           </a:xfrm>
           <a:prstGeom prst="rect">
             <a:avLst/>
@@ -4123,7 +4123,7 @@
           <a:p>
             <a:pPr algn="l"/>
             <a:r>
-              <a:rPr sz="1200" i="0" b="1" spc="312">
+              <a:rPr sz="1425" i="0" b="1" spc="313">
                 <a:solidFill>
                   <a:srgbClr val="A98BA6"/>
                 </a:solidFill>
@@ -4144,7 +4144,7 @@
         </p:nvSpPr>
         <p:spPr>
           <a:xfrm>
-            <a:off x="6603057" y="8277225"/>
+            <a:off x="6603057" y="8296275"/>
             <a:ext cx="5056108" cy="457200"/>
           </a:xfrm>
           <a:prstGeom prst="rect">
@@ -4179,8 +4179,8 @@
         </p:nvSpPr>
         <p:spPr>
           <a:xfrm>
-            <a:off x="1323975" y="15878175"/>
-            <a:ext cx="2841069" cy="247650"/>
+            <a:off x="1362075" y="15801975"/>
+            <a:ext cx="3326130" cy="295275"/>
           </a:xfrm>
           <a:prstGeom prst="rect">
             <a:avLst/>
@@ -4193,7 +4193,7 @@
           <a:p>
             <a:pPr algn="l"/>
             <a:r>
-              <a:rPr sz="1650" i="0" b="1" spc="330">
+              <a:rPr sz="2025" i="0" b="1" spc="364">
                 <a:solidFill>
                   <a:srgbClr val="F3EEE7"/>
                 </a:solidFill>
@@ -4214,8 +4214,8 @@
         </p:nvSpPr>
         <p:spPr>
           <a:xfrm>
-            <a:off x="3013918" y="15911512"/>
-            <a:ext cx="579120" cy="180975"/>
+            <a:off x="3355181" y="15792450"/>
+            <a:ext cx="731520" cy="314325"/>
           </a:xfrm>
           <a:prstGeom prst="rect">
             <a:avLst/>
@@ -4228,7 +4228,7 @@
           <a:p>
             <a:pPr algn="l"/>
             <a:r>
-              <a:rPr sz="1200" i="0" b="0">
+              <a:rPr sz="2100" i="0" b="0">
                 <a:solidFill>
                   <a:srgbClr val="A98BA6"/>
                 </a:solidFill>
@@ -4249,8 +4249,8 @@
         </p:nvSpPr>
         <p:spPr>
           <a:xfrm>
-            <a:off x="-2057400" y="17249775"/>
-            <a:ext cx="14401800" cy="180975"/>
+            <a:off x="-2057400" y="17211675"/>
+            <a:ext cx="14401800" cy="219075"/>
           </a:xfrm>
           <a:prstGeom prst="rect">
             <a:avLst/>
@@ -4263,7 +4263,7 @@
           <a:p>
             <a:pPr algn="ctr"/>
             <a:r>
-              <a:rPr sz="1200" i="0" b="1" spc="360">
+              <a:rPr sz="1425" i="0" b="1" spc="370">
                 <a:solidFill>
                   <a:srgbClr val="F3EEE7"/>
                 </a:solidFill>
